--- a/decks/englit-macbeth/englit-macbeth_ch1_world-of-the-play.pptx
+++ b/decks/englit-macbeth/englit-macbeth_ch1_world-of-the-play.pptx
@@ -123,36 +123,36 @@
   <p:extLst>
     <p:ext uri="{521415D9-36F7-43E2-AB2F-B90AF26B5E84}">
       <p14:sectionLst xmlns:p14="http://schemas.microsoft.com/office/powerpoint/2010/main">
-        <p14:section name="Opening" id="{ab8c32ac-cab8-febb-0773-efc80cec3c35}">
+        <p14:section name="Opening" id="{244577c0-037a-eba6-2e11-86ba71e74cb6}">
           <p14:sldIdLst>
             <p14:sldId id="256"/>
           </p14:sldIdLst>
         </p14:section>
-        <p14:section name="Gate" id="{82921d8d-8035-b4a1-c407-11de176b8d9f}">
+        <p14:section name="Gate" id="{b3b71940-aac7-2d90-be3d-9b171dd9a4a7}">
           <p14:sldIdLst>
             <p14:sldId id="257"/>
             <p14:sldId id="258"/>
           </p14:sldIdLst>
         </p14:section>
-        <p14:section name="Pre-teach" id="{d1907766-509e-a793-c1ca-20111b940e6c}">
+        <p14:section name="Pre-teach" id="{ae1466eb-872a-cb0a-4157-b979735c357d}">
           <p14:sldIdLst>
             <p14:sldId id="259"/>
           </p14:sldIdLst>
         </p14:section>
-        <p14:section name="Read-along" id="{81961bc0-4bb5-1222-666a-b420361633fd}">
+        <p14:section name="Read-along" id="{fbf4f722-3265-6ab1-1b8b-e8ae2efc4ce8}">
           <p14:sldIdLst>
             <p14:sldId id="260"/>
             <p14:sldId id="261"/>
           </p14:sldIdLst>
         </p14:section>
-        <p14:section name="Teach" id="{6f5cf09b-4da7-d8aa-d10a-855a1418655b}">
+        <p14:section name="Teach" id="{488c6d94-655d-9cb5-2a59-91c17d0b84de}">
           <p14:sldIdLst>
             <p14:sldId id="262"/>
             <p14:sldId id="263"/>
             <p14:sldId id="264"/>
           </p14:sldIdLst>
         </p14:section>
-        <p14:section name="Routes" id="{1d29f59b-e7d8-c9fb-dea2-f9e9a2d73c4f}">
+        <p14:section name="Routes" id="{a2760043-4cff-e64a-ac3b-048f0964fe9f}">
           <p14:sldIdLst>
             <p14:sldId id="265"/>
             <p14:sldId id="266"/>
@@ -160,12 +160,12 @@
             <p14:sldId id="268"/>
           </p14:sldIdLst>
         </p14:section>
-        <p14:section name="Close" id="{c12c2048-6cc4-57f0-b714-8a4553fce238}">
+        <p14:section name="Close" id="{8ea2f173-c0e2-2015-179e-bdc219c42263}">
           <p14:sldIdLst>
             <p14:sldId id="269"/>
           </p14:sldIdLst>
         </p14:section>
-        <p14:section name="Answers" id="{ef6a6f5c-3ca7-0394-5cad-6f80303a8220}">
+        <p14:section name="Answers" id="{e4a34027-152c-4061-e7d8-eb606049f021}">
           <p14:sldIdLst>
             <p14:sldId id="270"/>
             <p14:sldId id="271"/>
@@ -1045,7 +1045,7 @@
               <a:rPr lang="en-US" dirty="0"/>
               <a:t>Exit ticket — individual, silent, on a slip or mini-whiteboard. Recall before help: no notes, no lanes, no hints. Collect before pupils leave.
 Question: Who was King of England when Shakespeare wrote Macbeth?
-Answer: A   James I. James VI of Scotland became James I of England in 1603. Macbeth was written in about 1606.
+Answer: C   James I. James VI of Scotland became James I of England in 1603. Macbeth was written in about 1606.
 Source of this question: gate item 1 re-asked (options rotated) — this chapter has no third quick-check module.
 Sort the slips: correct → ready to move on; incorrect → start next lesson in the pre-teach group, with the read-along and the Support lane. Same destination next time.</a:t>
             </a:r>
@@ -1318,7 +1318,7 @@
             <a:r>
               <a:rPr lang="en-US" dirty="0"/>
               <a:t>Answers — exit ticket: Exit ticket. Reveal the answer; pupils mark their own work in a different colour, then read the "why" together. Same destination for every lane, so one answer serves the whole class.
-Answer: A   James I
+Answer: C   James I
 Why: James VI of Scotland became James I of England in 1603. Macbeth was written in about 1606.
 Ask a Support pupil to explain one step, and a Stretch pupil to share their extension.</a:t>
             </a:r>
@@ -1409,9 +1409,9 @@
             <a:r>
               <a:rPr lang="en-US" dirty="0"/>
               <a:t>Do now — retrieval. Silent, no notes, no help: recall comes before any support. Give about four minutes.
-1. Who was King of England when Shakespeare wrote Macbeth?  →  B   James I
+1. Who was King of England when Shakespeare wrote Macbeth?  →  D   James I
 2. The belief that God set a fixed order for everything is called the Great Chain of ___.  →  Being
-3. What was the Gunpowder Plot of 1605?  →  A   A plan to blow up Parliament and the king
+3. What was the Gunpowder Plot of 1605?  →  D   A plan to blow up Parliament and the king
 Circulate: who gets 3/3 (Stretch route), 2/3 (Core), 0–1 (Support)? Use this to route pupils later in the lesson.</a:t>
             </a:r>
             <a:endParaRPr lang="en-US" dirty="0"/>
@@ -1501,9 +1501,9 @@
             <a:r>
               <a:rPr lang="en-US" dirty="0"/>
               <a:t>Answers — pupils mark their own in a different colour, then hands up for 3/3, 2/3, 1/3.
-1. B   James I. James VI of Scotland became James I of England in 1603. Macbeth was written in about 1606.
+1. D   James I. James VI of Scotland became James I of England in 1603. Macbeth was written in about 1606.
 2. Being. The Great Chain of Being ran from God and the angels down to rocks. Kings sat near the top.
-3. A   A plan to blow up Parliament and the king. Plotters planned to blow up Parliament with James inside. It made traitors a fresh, real fear for the audience.
+3. D   A plan to blow up Parliament and the king. Plotters planned to blow up Parliament with James inside. It made traitors a fresh, real fear for the audience.
 Say the route each score points to: 3/3 Stretch, 2/3 Core, 0–1 Support. Pupils may choose to move up.</a:t>
             </a:r>
             <a:endParaRPr lang="en-US" dirty="0"/>
@@ -8176,7 +8176,7 @@
                 <a:ea typeface="Calibri" pitchFamily="34" charset="-122"/>
                 <a:cs typeface="Calibri" pitchFamily="34" charset="-120"/>
               </a:rPr>
-              <a:t>James I</a:t>
+              <a:t>Richard III</a:t>
             </a:r>
             <a:endParaRPr lang="en-US" sz="2400" dirty="0"/>
           </a:p>
@@ -8213,7 +8213,7 @@
                 <a:ea typeface="Calibri" pitchFamily="34" charset="-122"/>
                 <a:cs typeface="Calibri" pitchFamily="34" charset="-120"/>
               </a:rPr>
-              <a:t>Charles I</a:t>
+              <a:t>Henry VIII</a:t>
             </a:r>
             <a:endParaRPr lang="en-US" sz="2400" dirty="0"/>
           </a:p>
@@ -8250,7 +8250,7 @@
                 <a:ea typeface="Calibri" pitchFamily="34" charset="-122"/>
                 <a:cs typeface="Calibri" pitchFamily="34" charset="-120"/>
               </a:rPr>
-              <a:t>Richard III</a:t>
+              <a:t>James I</a:t>
             </a:r>
             <a:endParaRPr lang="en-US" sz="2400" dirty="0"/>
           </a:p>
@@ -8287,7 +8287,7 @@
                 <a:ea typeface="Calibri" pitchFamily="34" charset="-122"/>
                 <a:cs typeface="Calibri" pitchFamily="34" charset="-120"/>
               </a:rPr>
-              <a:t>Henry VIII</a:t>
+              <a:t>Charles I</a:t>
             </a:r>
             <a:endParaRPr lang="en-US" sz="2400" dirty="0"/>
           </a:p>
@@ -10017,7 +10017,7 @@
                 <a:ea typeface="Cambria" pitchFamily="34" charset="-122"/>
                 <a:cs typeface="Cambria" pitchFamily="34" charset="-120"/>
               </a:rPr>
-              <a:t>A   James I</a:t>
+              <a:t>C   James I</a:t>
             </a:r>
             <a:endParaRPr lang="en-US" sz="1800" dirty="0"/>
           </a:p>
@@ -10521,7 +10521,7 @@
           <a:p>
             <a:pPr algn="l" indent="0" marL="0">
               <a:spcAft>
-                <a:spcPts val="600"/>
+                <a:spcPts val="200"/>
               </a:spcAft>
               <a:buNone/>
             </a:pPr>
@@ -10538,7 +10538,7 @@
             </a:r>
             <a:pPr algn="l" indent="0" marL="0">
               <a:spcAft>
-                <a:spcPts val="600"/>
+                <a:spcPts val="200"/>
               </a:spcAft>
               <a:buNone/>
             </a:pPr>
@@ -10551,6 +10551,80 @@
                 <a:ea typeface="Calibri" pitchFamily="34" charset="-122"/>
                 <a:cs typeface="Calibri" pitchFamily="34" charset="-120"/>
               </a:rPr>
+              <a:t>Charles I</a:t>
+            </a:r>
+            <a:endParaRPr lang="en-US" sz="2400" dirty="0"/>
+          </a:p>
+          <a:p>
+            <a:pPr algn="l" indent="0" marL="0">
+              <a:spcAft>
+                <a:spcPts val="200"/>
+              </a:spcAft>
+              <a:buNone/>
+            </a:pPr>
+            <a:r>
+              <a:rPr lang="en-US" sz="2400" b="1" dirty="0">
+                <a:solidFill>
+                  <a:srgbClr val="B8862B"/>
+                </a:solidFill>
+                <a:latin typeface="Calibri" pitchFamily="34" charset="0"/>
+                <a:ea typeface="Calibri" pitchFamily="34" charset="-122"/>
+                <a:cs typeface="Calibri" pitchFamily="34" charset="-120"/>
+              </a:rPr>
+              <a:t>B   </a:t>
+            </a:r>
+            <a:pPr algn="l" indent="0" marL="0">
+              <a:spcAft>
+                <a:spcPts val="200"/>
+              </a:spcAft>
+              <a:buNone/>
+            </a:pPr>
+            <a:r>
+              <a:rPr lang="en-US" sz="2400" dirty="0">
+                <a:solidFill>
+                  <a:srgbClr val="1E2229"/>
+                </a:solidFill>
+                <a:latin typeface="Calibri" pitchFamily="34" charset="0"/>
+                <a:ea typeface="Calibri" pitchFamily="34" charset="-122"/>
+                <a:cs typeface="Calibri" pitchFamily="34" charset="-120"/>
+              </a:rPr>
+              <a:t>Richard III</a:t>
+            </a:r>
+            <a:endParaRPr lang="en-US" sz="2400" dirty="0"/>
+          </a:p>
+          <a:p>
+            <a:pPr algn="l" indent="0" marL="0">
+              <a:spcAft>
+                <a:spcPts val="200"/>
+              </a:spcAft>
+              <a:buNone/>
+            </a:pPr>
+            <a:r>
+              <a:rPr lang="en-US" sz="2400" b="1" dirty="0">
+                <a:solidFill>
+                  <a:srgbClr val="B8862B"/>
+                </a:solidFill>
+                <a:latin typeface="Calibri" pitchFamily="34" charset="0"/>
+                <a:ea typeface="Calibri" pitchFamily="34" charset="-122"/>
+                <a:cs typeface="Calibri" pitchFamily="34" charset="-120"/>
+              </a:rPr>
+              <a:t>C   </a:t>
+            </a:r>
+            <a:pPr algn="l" indent="0" marL="0">
+              <a:spcAft>
+                <a:spcPts val="200"/>
+              </a:spcAft>
+              <a:buNone/>
+            </a:pPr>
+            <a:r>
+              <a:rPr lang="en-US" sz="2400" dirty="0">
+                <a:solidFill>
+                  <a:srgbClr val="1E2229"/>
+                </a:solidFill>
+                <a:latin typeface="Calibri" pitchFamily="34" charset="0"/>
+                <a:ea typeface="Calibri" pitchFamily="34" charset="-122"/>
+                <a:cs typeface="Calibri" pitchFamily="34" charset="-120"/>
+              </a:rPr>
               <a:t>Henry VIII</a:t>
             </a:r>
             <a:endParaRPr lang="en-US" sz="2400" dirty="0"/>
@@ -10558,7 +10632,7 @@
           <a:p>
             <a:pPr algn="l" indent="0" marL="0">
               <a:spcAft>
-                <a:spcPts val="600"/>
+                <a:spcPts val="200"/>
               </a:spcAft>
               <a:buNone/>
             </a:pPr>
@@ -10571,11 +10645,11 @@
                 <a:ea typeface="Calibri" pitchFamily="34" charset="-122"/>
                 <a:cs typeface="Calibri" pitchFamily="34" charset="-120"/>
               </a:rPr>
-              <a:t>B   </a:t>
+              <a:t>D   </a:t>
             </a:r>
             <a:pPr algn="l" indent="0" marL="0">
               <a:spcAft>
-                <a:spcPts val="600"/>
+                <a:spcPts val="200"/>
               </a:spcAft>
               <a:buNone/>
             </a:pPr>
@@ -10589,80 +10663,6 @@
                 <a:cs typeface="Calibri" pitchFamily="34" charset="-120"/>
               </a:rPr>
               <a:t>James I</a:t>
-            </a:r>
-            <a:endParaRPr lang="en-US" sz="2400" dirty="0"/>
-          </a:p>
-          <a:p>
-            <a:pPr algn="l" indent="0" marL="0">
-              <a:spcAft>
-                <a:spcPts val="600"/>
-              </a:spcAft>
-              <a:buNone/>
-            </a:pPr>
-            <a:r>
-              <a:rPr lang="en-US" sz="2400" b="1" dirty="0">
-                <a:solidFill>
-                  <a:srgbClr val="B8862B"/>
-                </a:solidFill>
-                <a:latin typeface="Calibri" pitchFamily="34" charset="0"/>
-                <a:ea typeface="Calibri" pitchFamily="34" charset="-122"/>
-                <a:cs typeface="Calibri" pitchFamily="34" charset="-120"/>
-              </a:rPr>
-              <a:t>C   </a:t>
-            </a:r>
-            <a:pPr algn="l" indent="0" marL="0">
-              <a:spcAft>
-                <a:spcPts val="600"/>
-              </a:spcAft>
-              <a:buNone/>
-            </a:pPr>
-            <a:r>
-              <a:rPr lang="en-US" sz="2400" dirty="0">
-                <a:solidFill>
-                  <a:srgbClr val="1E2229"/>
-                </a:solidFill>
-                <a:latin typeface="Calibri" pitchFamily="34" charset="0"/>
-                <a:ea typeface="Calibri" pitchFamily="34" charset="-122"/>
-                <a:cs typeface="Calibri" pitchFamily="34" charset="-120"/>
-              </a:rPr>
-              <a:t>Charles I</a:t>
-            </a:r>
-            <a:endParaRPr lang="en-US" sz="2400" dirty="0"/>
-          </a:p>
-          <a:p>
-            <a:pPr algn="l" indent="0" marL="0">
-              <a:spcAft>
-                <a:spcPts val="600"/>
-              </a:spcAft>
-              <a:buNone/>
-            </a:pPr>
-            <a:r>
-              <a:rPr lang="en-US" sz="2400" b="1" dirty="0">
-                <a:solidFill>
-                  <a:srgbClr val="B8862B"/>
-                </a:solidFill>
-                <a:latin typeface="Calibri" pitchFamily="34" charset="0"/>
-                <a:ea typeface="Calibri" pitchFamily="34" charset="-122"/>
-                <a:cs typeface="Calibri" pitchFamily="34" charset="-120"/>
-              </a:rPr>
-              <a:t>D   </a:t>
-            </a:r>
-            <a:pPr algn="l" indent="0" marL="0">
-              <a:spcAft>
-                <a:spcPts val="600"/>
-              </a:spcAft>
-              <a:buNone/>
-            </a:pPr>
-            <a:r>
-              <a:rPr lang="en-US" sz="2400" dirty="0">
-                <a:solidFill>
-                  <a:srgbClr val="1E2229"/>
-                </a:solidFill>
-                <a:latin typeface="Calibri" pitchFamily="34" charset="0"/>
-                <a:ea typeface="Calibri" pitchFamily="34" charset="-122"/>
-                <a:cs typeface="Calibri" pitchFamily="34" charset="-120"/>
-              </a:rPr>
-              <a:t>Richard III</a:t>
             </a:r>
             <a:endParaRPr lang="en-US" sz="2400" dirty="0"/>
           </a:p>
@@ -11064,7 +11064,7 @@
                 <a:ea typeface="Calibri" pitchFamily="34" charset="-122"/>
                 <a:cs typeface="Calibri" pitchFamily="34" charset="-120"/>
               </a:rPr>
-              <a:t>A plan to blow up Parliament and the king</a:t>
+              <a:t>A war between England and Scotland</a:t>
             </a:r>
             <a:endParaRPr lang="en-US" sz="2000" dirty="0"/>
           </a:p>
@@ -11101,7 +11101,7 @@
                 <a:ea typeface="Calibri" pitchFamily="34" charset="-122"/>
                 <a:cs typeface="Calibri" pitchFamily="34" charset="-120"/>
               </a:rPr>
-              <a:t>A war between England and Scotland</a:t>
+              <a:t>A fire at Shakespeare's theatre</a:t>
             </a:r>
             <a:endParaRPr lang="en-US" sz="2000" dirty="0"/>
           </a:p>
@@ -11175,7 +11175,7 @@
                 <a:ea typeface="Calibri" pitchFamily="34" charset="-122"/>
                 <a:cs typeface="Calibri" pitchFamily="34" charset="-120"/>
               </a:rPr>
-              <a:t>A fire at Shakespeare's theatre</a:t>
+              <a:t>A plan to blow up Parliament and the king</a:t>
             </a:r>
             <a:endParaRPr lang="en-US" sz="2000" dirty="0"/>
           </a:p>
@@ -11576,7 +11576,7 @@
                 <a:ea typeface="Calibri" pitchFamily="34" charset="-122"/>
                 <a:cs typeface="Calibri" pitchFamily="34" charset="-120"/>
               </a:rPr>
-              <a:t>B   James I</a:t>
+              <a:t>D   James I</a:t>
             </a:r>
             <a:endParaRPr lang="en-US" sz="2200" dirty="0"/>
           </a:p>
@@ -12076,7 +12076,7 @@
                 <a:ea typeface="Calibri" pitchFamily="34" charset="-122"/>
                 <a:cs typeface="Calibri" pitchFamily="34" charset="-120"/>
               </a:rPr>
-              <a:t>A   A plan to blow up Parliament and the king</a:t>
+              <a:t>D   A plan to blow up Parliament and the king</a:t>
             </a:r>
             <a:endParaRPr lang="en-US" sz="2200" dirty="0"/>
           </a:p>

--- a/decks/englit-macbeth/englit-macbeth_ch1_world-of-the-play.pptx
+++ b/decks/englit-macbeth/englit-macbeth_ch1_world-of-the-play.pptx
@@ -123,36 +123,36 @@
   <p:extLst>
     <p:ext uri="{521415D9-36F7-43E2-AB2F-B90AF26B5E84}">
       <p14:sectionLst xmlns:p14="http://schemas.microsoft.com/office/powerpoint/2010/main">
-        <p14:section name="Opening" id="{244577c0-037a-eba6-2e11-86ba71e74cb6}">
+        <p14:section name="Opening" id="{51f2d672-b8e5-7e98-aa64-401ea11b2a0e}">
           <p14:sldIdLst>
             <p14:sldId id="256"/>
           </p14:sldIdLst>
         </p14:section>
-        <p14:section name="Gate" id="{b3b71940-aac7-2d90-be3d-9b171dd9a4a7}">
+        <p14:section name="Gate" id="{16468c5a-2bd2-d99f-6a7f-8a7b1130b286}">
           <p14:sldIdLst>
             <p14:sldId id="257"/>
             <p14:sldId id="258"/>
           </p14:sldIdLst>
         </p14:section>
-        <p14:section name="Pre-teach" id="{ae1466eb-872a-cb0a-4157-b979735c357d}">
+        <p14:section name="Pre-teach" id="{e14e9db5-7380-c2a1-df0e-26021fd11f0a}">
           <p14:sldIdLst>
             <p14:sldId id="259"/>
           </p14:sldIdLst>
         </p14:section>
-        <p14:section name="Read-along" id="{fbf4f722-3265-6ab1-1b8b-e8ae2efc4ce8}">
+        <p14:section name="Read-along" id="{c7ef335c-eefd-d166-3b11-e6dc7dbd65a6}">
           <p14:sldIdLst>
             <p14:sldId id="260"/>
             <p14:sldId id="261"/>
           </p14:sldIdLst>
         </p14:section>
-        <p14:section name="Teach" id="{488c6d94-655d-9cb5-2a59-91c17d0b84de}">
+        <p14:section name="Teach" id="{5bf5d53d-3231-d22c-52ae-cb240f809262}">
           <p14:sldIdLst>
             <p14:sldId id="262"/>
             <p14:sldId id="263"/>
             <p14:sldId id="264"/>
           </p14:sldIdLst>
         </p14:section>
-        <p14:section name="Routes" id="{a2760043-4cff-e64a-ac3b-048f0964fe9f}">
+        <p14:section name="Routes" id="{4a84b07f-a801-5781-4439-d8544f2aec8a}">
           <p14:sldIdLst>
             <p14:sldId id="265"/>
             <p14:sldId id="266"/>
@@ -160,12 +160,12 @@
             <p14:sldId id="268"/>
           </p14:sldIdLst>
         </p14:section>
-        <p14:section name="Close" id="{8ea2f173-c0e2-2015-179e-bdc219c42263}">
+        <p14:section name="Close" id="{f0f4a7ec-dd84-ef8e-124a-893c2f5e172a}">
           <p14:sldIdLst>
             <p14:sldId id="269"/>
           </p14:sldIdLst>
         </p14:section>
-        <p14:section name="Answers" id="{e4a34027-152c-4061-e7d8-eb606049f021}">
+        <p14:section name="Answers" id="{4e731c00-1189-df3e-7669-da47fe9b0baf}">
           <p14:sldIdLst>
             <p14:sldId id="270"/>
             <p14:sldId id="271"/>
